--- a/BuildingSecureMicroservicesInAzure/BuildingSecureMicroservicesInAzure.pptx
+++ b/BuildingSecureMicroservicesInAzure/BuildingSecureMicroservicesInAzure.pptx
@@ -222,7 +222,7 @@
           <a:p>
             <a:fld id="{BA11CBBD-FCCC-4341-9A07-9341F6C54581}" type="datetimeFigureOut">
               <a:rPr lang="en-US" smtClean="0"/>
-              <a:t>5/25/2023</a:t>
+              <a:t>10/14/25</a:t>
             </a:fld>
             <a:endParaRPr lang="en-US"/>
           </a:p>
@@ -605,6 +605,90 @@
             <p:ph type="sldImg"/>
           </p:nvPr>
         </p:nvSpPr>
+        <p:spPr/>
+      </p:sp>
+      <p:sp>
+        <p:nvSpPr>
+          <p:cNvPr id="3" name="Notes Placeholder 2"/>
+          <p:cNvSpPr>
+            <a:spLocks noGrp="1"/>
+          </p:cNvSpPr>
+          <p:nvPr>
+            <p:ph type="body" idx="1"/>
+          </p:nvPr>
+        </p:nvSpPr>
+        <p:spPr/>
+        <p:txBody>
+          <a:bodyPr/>
+          <a:lstStyle/>
+          <a:p>
+            <a:endParaRPr lang="en-US" dirty="0"/>
+          </a:p>
+        </p:txBody>
+      </p:sp>
+      <p:sp>
+        <p:nvSpPr>
+          <p:cNvPr id="4" name="Slide Number Placeholder 3"/>
+          <p:cNvSpPr>
+            <a:spLocks noGrp="1"/>
+          </p:cNvSpPr>
+          <p:nvPr>
+            <p:ph type="sldNum" sz="quarter" idx="5"/>
+          </p:nvPr>
+        </p:nvSpPr>
+        <p:spPr/>
+        <p:txBody>
+          <a:bodyPr/>
+          <a:lstStyle/>
+          <a:p>
+            <a:fld id="{97856D82-A927-4CCE-B899-0E7A70652ABD}" type="slidenum">
+              <a:rPr lang="en-US" smtClean="0"/>
+              <a:t>13</a:t>
+            </a:fld>
+            <a:endParaRPr lang="en-US"/>
+          </a:p>
+        </p:txBody>
+      </p:sp>
+    </p:spTree>
+    <p:extLst>
+      <p:ext uri="{BB962C8B-B14F-4D97-AF65-F5344CB8AC3E}">
+        <p14:creationId xmlns:p14="http://schemas.microsoft.com/office/powerpoint/2010/main" val="3311539945"/>
+      </p:ext>
+    </p:extLst>
+  </p:cSld>
+  <p:clrMapOvr>
+    <a:masterClrMapping/>
+  </p:clrMapOvr>
+</p:notes>
+</file>
+
+<file path=ppt/notesSlides/notesSlide3.xml><?xml version="1.0" encoding="utf-8"?>
+<p:notes xmlns:a="http://schemas.openxmlformats.org/drawingml/2006/main" xmlns:r="http://schemas.openxmlformats.org/officeDocument/2006/relationships" xmlns:p="http://schemas.openxmlformats.org/presentationml/2006/main">
+  <p:cSld>
+    <p:spTree>
+      <p:nvGrpSpPr>
+        <p:cNvPr id="1" name=""/>
+        <p:cNvGrpSpPr/>
+        <p:nvPr/>
+      </p:nvGrpSpPr>
+      <p:grpSpPr>
+        <a:xfrm>
+          <a:off x="0" y="0"/>
+          <a:ext cx="0" cy="0"/>
+          <a:chOff x="0" y="0"/>
+          <a:chExt cx="0" cy="0"/>
+        </a:xfrm>
+      </p:grpSpPr>
+      <p:sp>
+        <p:nvSpPr>
+          <p:cNvPr id="2" name="Slide Image Placeholder 1"/>
+          <p:cNvSpPr>
+            <a:spLocks noGrp="1" noRot="1" noChangeAspect="1"/>
+          </p:cNvSpPr>
+          <p:nvPr>
+            <p:ph type="sldImg"/>
+          </p:nvPr>
+        </p:nvSpPr>
         <p:spPr>
           <a:xfrm>
             <a:off x="381000" y="685800"/>
@@ -799,8 +883,12 @@
           </a:lstStyle>
           <a:p>
             <a:r>
-              <a:rPr lang="en-US"/>
-              <a:t>@jbogard</a:t>
+              <a:rPr lang="en-US" dirty="0"/>
+              <a:t>@</a:t>
+            </a:r>
+            <a:r>
+              <a:rPr lang="en-US" dirty="0" err="1"/>
+              <a:t>jimmybogard</a:t>
             </a:r>
             <a:endParaRPr lang="en-US" dirty="0"/>
           </a:p>
@@ -967,9 +1055,14 @@
           <a:lstStyle/>
           <a:p>
             <a:r>
-              <a:rPr lang="en-US"/>
-              <a:t>@jbogard</a:t>
-            </a:r>
+              <a:rPr lang="en-US" dirty="0"/>
+              <a:t>@</a:t>
+            </a:r>
+            <a:r>
+              <a:rPr lang="en-US" dirty="0" err="1"/>
+              <a:t>jimmybogard</a:t>
+            </a:r>
+            <a:endParaRPr lang="en-US" dirty="0"/>
           </a:p>
         </p:txBody>
       </p:sp>
@@ -1144,9 +1237,14 @@
           <a:lstStyle/>
           <a:p>
             <a:r>
-              <a:rPr lang="en-US"/>
-              <a:t>@jbogard</a:t>
-            </a:r>
+              <a:rPr lang="en-US" dirty="0"/>
+              <a:t>@</a:t>
+            </a:r>
+            <a:r>
+              <a:rPr lang="en-US" dirty="0" err="1"/>
+              <a:t>jimmybogard</a:t>
+            </a:r>
+            <a:endParaRPr lang="en-US" dirty="0"/>
           </a:p>
         </p:txBody>
       </p:sp>
@@ -1317,8 +1415,12 @@
           <a:lstStyle/>
           <a:p>
             <a:r>
-              <a:rPr lang="en-US"/>
-              <a:t>@jbogard</a:t>
+              <a:rPr lang="en-US" dirty="0"/>
+              <a:t>@</a:t>
+            </a:r>
+            <a:r>
+              <a:rPr lang="en-US" dirty="0" err="1"/>
+              <a:t>jimmybogard</a:t>
             </a:r>
             <a:endParaRPr lang="en-US" dirty="0"/>
           </a:p>
@@ -1578,8 +1680,12 @@
           </a:lstStyle>
           <a:p>
             <a:r>
-              <a:rPr lang="en-US"/>
-              <a:t>@jbogard</a:t>
+              <a:rPr lang="en-US" dirty="0"/>
+              <a:t>@</a:t>
+            </a:r>
+            <a:r>
+              <a:rPr lang="en-US" dirty="0" err="1"/>
+              <a:t>jimmybogard</a:t>
             </a:r>
             <a:endParaRPr lang="en-US" dirty="0"/>
           </a:p>
@@ -1811,8 +1917,12 @@
           </a:lstStyle>
           <a:p>
             <a:r>
-              <a:rPr lang="en-US"/>
-              <a:t>@jbogard</a:t>
+              <a:rPr lang="en-US" dirty="0"/>
+              <a:t>@</a:t>
+            </a:r>
+            <a:r>
+              <a:rPr lang="en-US" dirty="0" err="1"/>
+              <a:t>jimmybogard</a:t>
             </a:r>
             <a:endParaRPr lang="en-US" dirty="0"/>
           </a:p>
@@ -2175,9 +2285,14 @@
           <a:lstStyle/>
           <a:p>
             <a:r>
-              <a:rPr lang="en-US"/>
-              <a:t>@jbogard</a:t>
-            </a:r>
+              <a:rPr lang="en-US" dirty="0"/>
+              <a:t>@</a:t>
+            </a:r>
+            <a:r>
+              <a:rPr lang="en-US" dirty="0" err="1"/>
+              <a:t>jimmybogard</a:t>
+            </a:r>
+            <a:endParaRPr lang="en-US" dirty="0"/>
           </a:p>
         </p:txBody>
       </p:sp>
@@ -2295,8 +2410,12 @@
           </a:lstStyle>
           <a:p>
             <a:r>
-              <a:rPr lang="en-US"/>
-              <a:t>@jbogard</a:t>
+              <a:rPr lang="en-US" dirty="0"/>
+              <a:t>@</a:t>
+            </a:r>
+            <a:r>
+              <a:rPr lang="en-US" dirty="0" err="1"/>
+              <a:t>jimmybogard</a:t>
             </a:r>
             <a:endParaRPr lang="en-US" dirty="0"/>
           </a:p>
@@ -2394,8 +2513,12 @@
           </a:lstStyle>
           <a:p>
             <a:r>
-              <a:rPr lang="en-US"/>
-              <a:t>@jbogard</a:t>
+              <a:rPr lang="en-US" dirty="0"/>
+              <a:t>@</a:t>
+            </a:r>
+            <a:r>
+              <a:rPr lang="en-US" dirty="0" err="1"/>
+              <a:t>jimmybogard</a:t>
             </a:r>
             <a:endParaRPr lang="en-US" dirty="0"/>
           </a:p>
@@ -2669,9 +2792,14 @@
           <a:lstStyle/>
           <a:p>
             <a:r>
-              <a:rPr lang="en-US"/>
-              <a:t>@jbogard</a:t>
-            </a:r>
+              <a:rPr lang="en-US" dirty="0"/>
+              <a:t>@</a:t>
+            </a:r>
+            <a:r>
+              <a:rPr lang="en-US" dirty="0" err="1"/>
+              <a:t>jimmybogard</a:t>
+            </a:r>
+            <a:endParaRPr lang="en-US" dirty="0"/>
           </a:p>
         </p:txBody>
       </p:sp>
@@ -2920,9 +3048,14 @@
           <a:lstStyle/>
           <a:p>
             <a:r>
-              <a:rPr lang="en-US"/>
-              <a:t>@jbogard</a:t>
-            </a:r>
+              <a:rPr lang="en-US" dirty="0"/>
+              <a:t>@</a:t>
+            </a:r>
+            <a:r>
+              <a:rPr lang="en-US" dirty="0" err="1"/>
+              <a:t>jimmybogard</a:t>
+            </a:r>
+            <a:endParaRPr lang="en-US" dirty="0"/>
           </a:p>
         </p:txBody>
       </p:sp>
@@ -3130,8 +3263,12 @@
           </a:lstStyle>
           <a:p>
             <a:r>
-              <a:rPr lang="en-US"/>
-              <a:t>@jbogard</a:t>
+              <a:rPr lang="en-US" dirty="0"/>
+              <a:t>@</a:t>
+            </a:r>
+            <a:r>
+              <a:rPr lang="en-US" dirty="0" err="1"/>
+              <a:t>jimmybogard</a:t>
             </a:r>
             <a:endParaRPr lang="en-US" dirty="0"/>
           </a:p>
@@ -3620,7 +3757,7 @@
             </a:r>
             <a:r>
               <a:rPr lang="en-US" dirty="0" err="1"/>
-              <a:t>jbogard</a:t>
+              <a:t>jimmybogard</a:t>
             </a:r>
             <a:endParaRPr lang="en-US" dirty="0"/>
           </a:p>
@@ -3646,7 +3783,7 @@
       </p:sp>
       <p:pic>
         <p:nvPicPr>
-          <p:cNvPr id="9" name="Picture 4" descr="https://mvp.support.microsoft.com/library/images/support/en-US/MVPLogo.gif"/>
+          <p:cNvPr id="12" name="Picture 12" descr="AutoMapper"/>
           <p:cNvPicPr>
             <a:picLocks noChangeAspect="1" noChangeArrowheads="1"/>
           </p:cNvPicPr>
@@ -3667,8 +3804,8 @@
         </p:blipFill>
         <p:spPr bwMode="auto">
           <a:xfrm>
-            <a:off x="3230080" y="4637554"/>
-            <a:ext cx="1095375" cy="1714500"/>
+            <a:off x="5608299" y="4809973"/>
+            <a:ext cx="3733800" cy="382377"/>
           </a:xfrm>
           <a:prstGeom prst="rect">
             <a:avLst/>
@@ -3687,63 +3824,58 @@
       </p:pic>
       <p:pic>
         <p:nvPicPr>
-          <p:cNvPr id="12" name="Picture 12" descr="AutoMapper"/>
+          <p:cNvPr id="4" name="Picture 3"/>
           <p:cNvPicPr>
-            <a:picLocks noChangeAspect="1" noChangeArrowheads="1"/>
+            <a:picLocks noChangeAspect="1"/>
           </p:cNvPicPr>
           <p:nvPr/>
         </p:nvPicPr>
         <p:blipFill>
-          <a:blip r:embed="rId7">
-            <a:extLst>
-              <a:ext uri="{28A0092B-C50C-407E-A947-70E740481C1C}">
-                <a14:useLocalDpi xmlns:a14="http://schemas.microsoft.com/office/drawing/2010/main" val="0"/>
-              </a:ext>
-            </a:extLst>
-          </a:blip>
-          <a:srcRect/>
+          <a:blip r:embed="rId7"/>
           <a:stretch>
             <a:fillRect/>
           </a:stretch>
         </p:blipFill>
-        <p:spPr bwMode="auto">
-          <a:xfrm>
-            <a:off x="5608299" y="4809973"/>
-            <a:ext cx="3733800" cy="382377"/>
+        <p:spPr>
+          <a:xfrm>
+            <a:off x="6949172" y="5420546"/>
+            <a:ext cx="1052054" cy="1052054"/>
           </a:xfrm>
           <a:prstGeom prst="rect">
             <a:avLst/>
           </a:prstGeom>
-          <a:noFill/>
-          <a:extLst>
-            <a:ext uri="{909E8E84-426E-40DD-AFC4-6F175D3DCCD1}">
-              <a14:hiddenFill xmlns:a14="http://schemas.microsoft.com/office/drawing/2010/main">
-                <a:solidFill>
-                  <a:srgbClr val="FFFFFF"/>
-                </a:solidFill>
-              </a14:hiddenFill>
-            </a:ext>
-          </a:extLst>
         </p:spPr>
       </p:pic>
       <p:pic>
         <p:nvPicPr>
-          <p:cNvPr id="4" name="Picture 3"/>
+          <p:cNvPr id="5" name="Picture 4">
+            <a:extLst>
+              <a:ext uri="{FF2B5EF4-FFF2-40B4-BE49-F238E27FC236}">
+                <a16:creationId xmlns:a16="http://schemas.microsoft.com/office/drawing/2014/main" id="{344052E1-D98C-0B7C-72B1-D9306E2F7ADA}"/>
+              </a:ext>
+            </a:extLst>
+          </p:cNvPr>
           <p:cNvPicPr>
             <a:picLocks noChangeAspect="1"/>
           </p:cNvPicPr>
           <p:nvPr/>
         </p:nvPicPr>
         <p:blipFill>
-          <a:blip r:embed="rId8"/>
+          <a:blip r:embed="rId8">
+            <a:extLst>
+              <a:ext uri="{28A0092B-C50C-407E-A947-70E740481C1C}">
+                <a14:useLocalDpi xmlns:a14="http://schemas.microsoft.com/office/drawing/2010/main" val="0"/>
+              </a:ext>
+            </a:extLst>
+          </a:blip>
           <a:stretch>
             <a:fillRect/>
           </a:stretch>
         </p:blipFill>
         <p:spPr>
           <a:xfrm>
-            <a:off x="6949172" y="5420546"/>
-            <a:ext cx="1052054" cy="1052054"/>
+            <a:off x="3223042" y="4908445"/>
+            <a:ext cx="914400" cy="1447800"/>
           </a:xfrm>
           <a:prstGeom prst="rect">
             <a:avLst/>
@@ -3885,8 +4017,12 @@
           <a:lstStyle/>
           <a:p>
             <a:r>
-              <a:rPr lang="en-US"/>
-              <a:t>@jbogard</a:t>
+              <a:rPr lang="en-US" dirty="0"/>
+              <a:t>@</a:t>
+            </a:r>
+            <a:r>
+              <a:rPr lang="en-US" dirty="0" err="1"/>
+              <a:t>jimmybogard</a:t>
             </a:r>
             <a:endParaRPr lang="en-US" dirty="0"/>
           </a:p>
@@ -4000,8 +4136,12 @@
           <a:lstStyle/>
           <a:p>
             <a:r>
-              <a:rPr lang="en-US"/>
-              <a:t>@jbogard</a:t>
+              <a:rPr lang="en-US" dirty="0"/>
+              <a:t>@</a:t>
+            </a:r>
+            <a:r>
+              <a:rPr lang="en-US" dirty="0" err="1"/>
+              <a:t>jimmybogard</a:t>
             </a:r>
             <a:endParaRPr lang="en-US" dirty="0"/>
           </a:p>
@@ -4228,8 +4368,12 @@
           <a:lstStyle/>
           <a:p>
             <a:r>
-              <a:rPr lang="en-US"/>
-              <a:t>@jbogard</a:t>
+              <a:rPr lang="en-US" dirty="0"/>
+              <a:t>@</a:t>
+            </a:r>
+            <a:r>
+              <a:rPr lang="en-US" dirty="0" err="1"/>
+              <a:t>jimmybogard</a:t>
             </a:r>
             <a:endParaRPr lang="en-US" dirty="0"/>
           </a:p>
@@ -5711,7 +5855,7 @@
           <a:p>
             <a:r>
               <a:rPr lang="en-US" dirty="0"/>
-              <a:t>Solution: Azure AD</a:t>
+              <a:t>Solution: Microsoft Entra ID</a:t>
             </a:r>
           </a:p>
         </p:txBody>
@@ -5738,8 +5882,12 @@
           <a:lstStyle/>
           <a:p>
             <a:r>
-              <a:rPr lang="en-US"/>
-              <a:t>@jbogard</a:t>
+              <a:rPr lang="en-US" dirty="0"/>
+              <a:t>@</a:t>
+            </a:r>
+            <a:r>
+              <a:rPr lang="en-US" dirty="0" err="1"/>
+              <a:t>jimmybogard</a:t>
             </a:r>
             <a:endParaRPr lang="en-US" dirty="0"/>
           </a:p>
@@ -5760,13 +5908,13 @@
           <p:nvPr/>
         </p:nvPicPr>
         <p:blipFill>
-          <a:blip r:embed="rId2">
+          <a:blip r:embed="rId3">
             <a:extLst>
               <a:ext uri="{28A0092B-C50C-407E-A947-70E740481C1C}">
                 <a14:useLocalDpi xmlns:a14="http://schemas.microsoft.com/office/drawing/2010/main" val="0"/>
               </a:ext>
               <a:ext uri="{96DAC541-7B7A-43D3-8B79-37D633B846F1}">
-                <asvg:svgBlip xmlns:asvg="http://schemas.microsoft.com/office/drawing/2016/SVG/main" r:embed="rId3"/>
+                <asvg:svgBlip xmlns:asvg="http://schemas.microsoft.com/office/drawing/2016/SVG/main" r:embed="rId4"/>
               </a:ext>
             </a:extLst>
           </a:blip>
@@ -5799,13 +5947,13 @@
           <p:nvPr/>
         </p:nvPicPr>
         <p:blipFill>
-          <a:blip r:embed="rId4">
+          <a:blip r:embed="rId5">
             <a:extLst>
               <a:ext uri="{28A0092B-C50C-407E-A947-70E740481C1C}">
                 <a14:useLocalDpi xmlns:a14="http://schemas.microsoft.com/office/drawing/2010/main" val="0"/>
               </a:ext>
               <a:ext uri="{96DAC541-7B7A-43D3-8B79-37D633B846F1}">
-                <asvg:svgBlip xmlns:asvg="http://schemas.microsoft.com/office/drawing/2016/SVG/main" r:embed="rId5"/>
+                <asvg:svgBlip xmlns:asvg="http://schemas.microsoft.com/office/drawing/2016/SVG/main" r:embed="rId6"/>
               </a:ext>
             </a:extLst>
           </a:blip>
@@ -6029,13 +6177,13 @@
           <p:nvPr/>
         </p:nvPicPr>
         <p:blipFill>
-          <a:blip r:embed="rId2">
+          <a:blip r:embed="rId3">
             <a:extLst>
               <a:ext uri="{28A0092B-C50C-407E-A947-70E740481C1C}">
                 <a14:useLocalDpi xmlns:a14="http://schemas.microsoft.com/office/drawing/2010/main" val="0"/>
               </a:ext>
               <a:ext uri="{96DAC541-7B7A-43D3-8B79-37D633B846F1}">
-                <asvg:svgBlip xmlns:asvg="http://schemas.microsoft.com/office/drawing/2016/SVG/main" r:embed="rId3"/>
+                <asvg:svgBlip xmlns:asvg="http://schemas.microsoft.com/office/drawing/2016/SVG/main" r:embed="rId4"/>
               </a:ext>
             </a:extLst>
           </a:blip>
@@ -6068,13 +6216,13 @@
           <p:nvPr/>
         </p:nvPicPr>
         <p:blipFill>
-          <a:blip r:embed="rId2">
+          <a:blip r:embed="rId3">
             <a:extLst>
               <a:ext uri="{28A0092B-C50C-407E-A947-70E740481C1C}">
                 <a14:useLocalDpi xmlns:a14="http://schemas.microsoft.com/office/drawing/2010/main" val="0"/>
               </a:ext>
               <a:ext uri="{96DAC541-7B7A-43D3-8B79-37D633B846F1}">
-                <asvg:svgBlip xmlns:asvg="http://schemas.microsoft.com/office/drawing/2016/SVG/main" r:embed="rId3"/>
+                <asvg:svgBlip xmlns:asvg="http://schemas.microsoft.com/office/drawing/2016/SVG/main" r:embed="rId4"/>
               </a:ext>
             </a:extLst>
           </a:blip>
@@ -6107,13 +6255,13 @@
           <p:nvPr/>
         </p:nvPicPr>
         <p:blipFill>
-          <a:blip r:embed="rId4">
+          <a:blip r:embed="rId5">
             <a:extLst>
               <a:ext uri="{28A0092B-C50C-407E-A947-70E740481C1C}">
                 <a14:useLocalDpi xmlns:a14="http://schemas.microsoft.com/office/drawing/2010/main" val="0"/>
               </a:ext>
               <a:ext uri="{96DAC541-7B7A-43D3-8B79-37D633B846F1}">
-                <asvg:svgBlip xmlns:asvg="http://schemas.microsoft.com/office/drawing/2016/SVG/main" r:embed="rId5"/>
+                <asvg:svgBlip xmlns:asvg="http://schemas.microsoft.com/office/drawing/2016/SVG/main" r:embed="rId6"/>
               </a:ext>
             </a:extLst>
           </a:blip>
@@ -6146,13 +6294,13 @@
           <p:nvPr/>
         </p:nvPicPr>
         <p:blipFill>
-          <a:blip r:embed="rId2">
+          <a:blip r:embed="rId3">
             <a:extLst>
               <a:ext uri="{28A0092B-C50C-407E-A947-70E740481C1C}">
                 <a14:useLocalDpi xmlns:a14="http://schemas.microsoft.com/office/drawing/2010/main" val="0"/>
               </a:ext>
               <a:ext uri="{96DAC541-7B7A-43D3-8B79-37D633B846F1}">
-                <asvg:svgBlip xmlns:asvg="http://schemas.microsoft.com/office/drawing/2016/SVG/main" r:embed="rId3"/>
+                <asvg:svgBlip xmlns:asvg="http://schemas.microsoft.com/office/drawing/2016/SVG/main" r:embed="rId4"/>
               </a:ext>
             </a:extLst>
           </a:blip>
@@ -6185,13 +6333,13 @@
           <p:nvPr/>
         </p:nvPicPr>
         <p:blipFill>
-          <a:blip r:embed="rId4">
+          <a:blip r:embed="rId5">
             <a:extLst>
               <a:ext uri="{28A0092B-C50C-407E-A947-70E740481C1C}">
                 <a14:useLocalDpi xmlns:a14="http://schemas.microsoft.com/office/drawing/2010/main" val="0"/>
               </a:ext>
               <a:ext uri="{96DAC541-7B7A-43D3-8B79-37D633B846F1}">
-                <asvg:svgBlip xmlns:asvg="http://schemas.microsoft.com/office/drawing/2016/SVG/main" r:embed="rId5"/>
+                <asvg:svgBlip xmlns:asvg="http://schemas.microsoft.com/office/drawing/2016/SVG/main" r:embed="rId6"/>
               </a:ext>
             </a:extLst>
           </a:blip>
@@ -6271,13 +6419,13 @@
           <p:nvPr/>
         </p:nvPicPr>
         <p:blipFill>
-          <a:blip r:embed="rId6">
+          <a:blip r:embed="rId7">
             <a:extLst>
               <a:ext uri="{28A0092B-C50C-407E-A947-70E740481C1C}">
                 <a14:useLocalDpi xmlns:a14="http://schemas.microsoft.com/office/drawing/2010/main" val="0"/>
               </a:ext>
               <a:ext uri="{96DAC541-7B7A-43D3-8B79-37D633B846F1}">
-                <asvg:svgBlip xmlns:asvg="http://schemas.microsoft.com/office/drawing/2016/SVG/main" r:embed="rId7"/>
+                <asvg:svgBlip xmlns:asvg="http://schemas.microsoft.com/office/drawing/2016/SVG/main" r:embed="rId8"/>
               </a:ext>
             </a:extLst>
           </a:blip>
@@ -6310,13 +6458,13 @@
           <p:nvPr/>
         </p:nvPicPr>
         <p:blipFill>
-          <a:blip r:embed="rId6">
+          <a:blip r:embed="rId7">
             <a:extLst>
               <a:ext uri="{28A0092B-C50C-407E-A947-70E740481C1C}">
                 <a14:useLocalDpi xmlns:a14="http://schemas.microsoft.com/office/drawing/2010/main" val="0"/>
               </a:ext>
               <a:ext uri="{96DAC541-7B7A-43D3-8B79-37D633B846F1}">
-                <asvg:svgBlip xmlns:asvg="http://schemas.microsoft.com/office/drawing/2016/SVG/main" r:embed="rId7"/>
+                <asvg:svgBlip xmlns:asvg="http://schemas.microsoft.com/office/drawing/2016/SVG/main" r:embed="rId8"/>
               </a:ext>
             </a:extLst>
           </a:blip>
@@ -6349,13 +6497,13 @@
           <p:nvPr/>
         </p:nvPicPr>
         <p:blipFill>
-          <a:blip r:embed="rId6">
+          <a:blip r:embed="rId7">
             <a:extLst>
               <a:ext uri="{28A0092B-C50C-407E-A947-70E740481C1C}">
                 <a14:useLocalDpi xmlns:a14="http://schemas.microsoft.com/office/drawing/2010/main" val="0"/>
               </a:ext>
               <a:ext uri="{96DAC541-7B7A-43D3-8B79-37D633B846F1}">
-                <asvg:svgBlip xmlns:asvg="http://schemas.microsoft.com/office/drawing/2016/SVG/main" r:embed="rId7"/>
+                <asvg:svgBlip xmlns:asvg="http://schemas.microsoft.com/office/drawing/2016/SVG/main" r:embed="rId8"/>
               </a:ext>
             </a:extLst>
           </a:blip>
@@ -6843,13 +6991,13 @@
           <p:nvPr/>
         </p:nvPicPr>
         <p:blipFill>
-          <a:blip r:embed="rId8" cstate="print">
+          <a:blip r:embed="rId9" cstate="print">
             <a:extLst>
               <a:ext uri="{28A0092B-C50C-407E-A947-70E740481C1C}">
                 <a14:useLocalDpi xmlns:a14="http://schemas.microsoft.com/office/drawing/2010/main" val="0"/>
               </a:ext>
               <a:ext uri="{96DAC541-7B7A-43D3-8B79-37D633B846F1}">
-                <asvg:svgBlip xmlns:asvg="http://schemas.microsoft.com/office/drawing/2016/SVG/main" r:embed="rId9"/>
+                <asvg:svgBlip xmlns:asvg="http://schemas.microsoft.com/office/drawing/2016/SVG/main" r:embed="rId10"/>
               </a:ext>
             </a:extLst>
           </a:blip>
@@ -6882,13 +7030,13 @@
           <p:nvPr/>
         </p:nvPicPr>
         <p:blipFill>
-          <a:blip r:embed="rId10" cstate="print">
+          <a:blip r:embed="rId11" cstate="print">
             <a:extLst>
               <a:ext uri="{28A0092B-C50C-407E-A947-70E740481C1C}">
                 <a14:useLocalDpi xmlns:a14="http://schemas.microsoft.com/office/drawing/2010/main" val="0"/>
               </a:ext>
               <a:ext uri="{96DAC541-7B7A-43D3-8B79-37D633B846F1}">
-                <asvg:svgBlip xmlns:asvg="http://schemas.microsoft.com/office/drawing/2016/SVG/main" r:embed="rId11"/>
+                <asvg:svgBlip xmlns:asvg="http://schemas.microsoft.com/office/drawing/2016/SVG/main" r:embed="rId12"/>
               </a:ext>
             </a:extLst>
           </a:blip>
@@ -7141,8 +7289,12 @@
           <a:lstStyle/>
           <a:p>
             <a:r>
-              <a:rPr lang="en-US"/>
-              <a:t>@jbogard</a:t>
+              <a:rPr lang="en-US" dirty="0"/>
+              <a:t>@</a:t>
+            </a:r>
+            <a:r>
+              <a:rPr lang="en-US" dirty="0" err="1"/>
+              <a:t>jimmybogard</a:t>
             </a:r>
             <a:endParaRPr lang="en-US" dirty="0"/>
           </a:p>
@@ -7201,7 +7353,7 @@
           <a:p>
             <a:r>
               <a:rPr lang="en-US" dirty="0"/>
-              <a:t>Azure AD OAuth 2.0 flows</a:t>
+              <a:t>Entra ID OAuth 2.0 flows</a:t>
             </a:r>
           </a:p>
         </p:txBody>
@@ -7228,8 +7380,12 @@
           <a:lstStyle/>
           <a:p>
             <a:r>
-              <a:rPr lang="en-US"/>
-              <a:t>@jbogard</a:t>
+              <a:rPr lang="en-US" dirty="0"/>
+              <a:t>@</a:t>
+            </a:r>
+            <a:r>
+              <a:rPr lang="en-US" dirty="0" err="1"/>
+              <a:t>jimmybogard</a:t>
             </a:r>
             <a:endParaRPr lang="en-US" dirty="0"/>
           </a:p>
@@ -7250,7 +7406,7 @@
           <p:nvPr>
             <p:extLst>
               <p:ext uri="{D42A27DB-BD31-4B8C-83A1-F6EECF244321}">
-                <p14:modId xmlns:p14="http://schemas.microsoft.com/office/powerpoint/2010/main" val="3049940127"/>
+                <p14:modId xmlns:p14="http://schemas.microsoft.com/office/powerpoint/2010/main" val="3896301327"/>
               </p:ext>
             </p:extLst>
           </p:nvPr>
@@ -7644,7 +7800,7 @@
                     <a:p>
                       <a:r>
                         <a:rPr lang="en-US" sz="1800" dirty="0"/>
-                        <a:t>App-only permissions that have no user, only inside Azure AD</a:t>
+                        <a:t>App-only permissions that have no user, only inside Entra ID</a:t>
                       </a:r>
                     </a:p>
                   </a:txBody>
@@ -7713,7 +7869,7 @@
           <a:p>
             <a:r>
               <a:rPr lang="en-US" dirty="0"/>
-              <a:t>Azure AD OAuth 2.0 flows</a:t>
+              <a:t>Entra ID OAuth 2.0 flows</a:t>
             </a:r>
           </a:p>
         </p:txBody>
@@ -7740,8 +7896,12 @@
           <a:lstStyle/>
           <a:p>
             <a:r>
-              <a:rPr lang="en-US"/>
-              <a:t>@jbogard</a:t>
+              <a:rPr lang="en-US" dirty="0"/>
+              <a:t>@</a:t>
+            </a:r>
+            <a:r>
+              <a:rPr lang="en-US" dirty="0" err="1"/>
+              <a:t>jimmybogard</a:t>
             </a:r>
             <a:endParaRPr lang="en-US" dirty="0"/>
           </a:p>
@@ -7762,7 +7922,7 @@
           <p:nvPr>
             <p:extLst>
               <p:ext uri="{D42A27DB-BD31-4B8C-83A1-F6EECF244321}">
-                <p14:modId xmlns:p14="http://schemas.microsoft.com/office/powerpoint/2010/main" val="3981039160"/>
+                <p14:modId xmlns:p14="http://schemas.microsoft.com/office/powerpoint/2010/main" val="1013173268"/>
               </p:ext>
             </p:extLst>
           </p:nvPr>
@@ -8176,7 +8336,7 @@
                     <a:p>
                       <a:r>
                         <a:rPr lang="en-US" sz="1800" dirty="0"/>
-                        <a:t>App-only permissions that have no user, only inside Azure AD</a:t>
+                        <a:t>App-only permissions that have no user, only inside Entra ID</a:t>
                       </a:r>
                     </a:p>
                   </a:txBody>
@@ -8249,7 +8409,7 @@
           <a:p>
             <a:r>
               <a:rPr lang="en-US" dirty="0"/>
-              <a:t>Azure AD OAuth 2.0 flows</a:t>
+              <a:t>Entra ID OAuth 2.0 flows</a:t>
             </a:r>
           </a:p>
         </p:txBody>
@@ -8276,8 +8436,12 @@
           <a:lstStyle/>
           <a:p>
             <a:r>
-              <a:rPr lang="en-US"/>
-              <a:t>@jbogard</a:t>
+              <a:rPr lang="en-US" dirty="0"/>
+              <a:t>@</a:t>
+            </a:r>
+            <a:r>
+              <a:rPr lang="en-US" dirty="0" err="1"/>
+              <a:t>jimmybogard</a:t>
             </a:r>
             <a:endParaRPr lang="en-US" dirty="0"/>
           </a:p>
@@ -8298,7 +8462,7 @@
           <p:nvPr>
             <p:extLst>
               <p:ext uri="{D42A27DB-BD31-4B8C-83A1-F6EECF244321}">
-                <p14:modId xmlns:p14="http://schemas.microsoft.com/office/powerpoint/2010/main" val="1661269921"/>
+                <p14:modId xmlns:p14="http://schemas.microsoft.com/office/powerpoint/2010/main" val="2125931142"/>
               </p:ext>
             </p:extLst>
           </p:nvPr>
@@ -8700,7 +8864,7 @@
                     <a:p>
                       <a:r>
                         <a:rPr lang="en-US" sz="1800" dirty="0"/>
-                        <a:t>App-only permissions that have no user, only inside Azure AD</a:t>
+                        <a:t>App-only permissions that have no user, only inside Entra ID</a:t>
                       </a:r>
                     </a:p>
                   </a:txBody>
@@ -8825,8 +8989,12 @@
           <a:lstStyle/>
           <a:p>
             <a:r>
-              <a:rPr lang="en-US"/>
-              <a:t>@jbogard</a:t>
+              <a:rPr lang="en-US" dirty="0"/>
+              <a:t>@</a:t>
+            </a:r>
+            <a:r>
+              <a:rPr lang="en-US" dirty="0" err="1"/>
+              <a:t>jimmybogard</a:t>
             </a:r>
             <a:endParaRPr lang="en-US" dirty="0"/>
           </a:p>
@@ -9062,8 +9230,12 @@
           <a:lstStyle/>
           <a:p>
             <a:r>
-              <a:rPr lang="en-US"/>
-              <a:t>@jbogard</a:t>
+              <a:rPr lang="en-US" dirty="0"/>
+              <a:t>@</a:t>
+            </a:r>
+            <a:r>
+              <a:rPr lang="en-US" dirty="0" err="1"/>
+              <a:t>jimmybogard</a:t>
             </a:r>
             <a:endParaRPr lang="en-US" dirty="0"/>
           </a:p>
@@ -9174,8 +9346,12 @@
           <a:lstStyle/>
           <a:p>
             <a:r>
-              <a:rPr lang="en-US"/>
-              <a:t>@jbogard</a:t>
+              <a:rPr lang="en-US" dirty="0"/>
+              <a:t>@</a:t>
+            </a:r>
+            <a:r>
+              <a:rPr lang="en-US" dirty="0" err="1"/>
+              <a:t>jimmybogard</a:t>
             </a:r>
             <a:endParaRPr lang="en-US" dirty="0"/>
           </a:p>
@@ -9261,9 +9437,14 @@
           <a:lstStyle/>
           <a:p>
             <a:r>
-              <a:rPr lang="en-US"/>
-              <a:t>@jbogard</a:t>
-            </a:r>
+              <a:rPr lang="en-US" dirty="0"/>
+              <a:t>@</a:t>
+            </a:r>
+            <a:r>
+              <a:rPr lang="en-US" dirty="0" err="1"/>
+              <a:t>jimmybogard</a:t>
+            </a:r>
+            <a:endParaRPr lang="en-US" dirty="0"/>
           </a:p>
         </p:txBody>
       </p:sp>
@@ -9919,8 +10100,12 @@
           <a:lstStyle/>
           <a:p>
             <a:r>
-              <a:rPr lang="en-US"/>
-              <a:t>@jbogard</a:t>
+              <a:rPr lang="en-US" dirty="0"/>
+              <a:t>@</a:t>
+            </a:r>
+            <a:r>
+              <a:rPr lang="en-US" dirty="0" err="1"/>
+              <a:t>jimmybogard</a:t>
             </a:r>
             <a:endParaRPr lang="en-US" dirty="0"/>
           </a:p>
@@ -10609,8 +10794,12 @@
           <a:lstStyle/>
           <a:p>
             <a:r>
-              <a:rPr lang="en-US"/>
-              <a:t>@jbogard</a:t>
+              <a:rPr lang="en-US" dirty="0"/>
+              <a:t>@</a:t>
+            </a:r>
+            <a:r>
+              <a:rPr lang="en-US" dirty="0" err="1"/>
+              <a:t>jimmybogard</a:t>
             </a:r>
             <a:endParaRPr lang="en-US" dirty="0"/>
           </a:p>
@@ -11251,8 +11440,12 @@
           <a:lstStyle/>
           <a:p>
             <a:r>
-              <a:rPr lang="en-US"/>
-              <a:t>@jbogard</a:t>
+              <a:rPr lang="en-US" dirty="0"/>
+              <a:t>@</a:t>
+            </a:r>
+            <a:r>
+              <a:rPr lang="en-US" dirty="0" err="1"/>
+              <a:t>jimmybogard</a:t>
             </a:r>
             <a:endParaRPr lang="en-US" dirty="0"/>
           </a:p>
@@ -11893,8 +12086,12 @@
           <a:lstStyle/>
           <a:p>
             <a:r>
-              <a:rPr lang="en-US"/>
-              <a:t>@jbogard</a:t>
+              <a:rPr lang="en-US" dirty="0"/>
+              <a:t>@</a:t>
+            </a:r>
+            <a:r>
+              <a:rPr lang="en-US" dirty="0" err="1"/>
+              <a:t>jimmybogard</a:t>
             </a:r>
             <a:endParaRPr lang="en-US" dirty="0"/>
           </a:p>
@@ -11980,9 +12177,14 @@
           <a:lstStyle/>
           <a:p>
             <a:r>
-              <a:rPr lang="en-US"/>
-              <a:t>@jbogard</a:t>
-            </a:r>
+              <a:rPr lang="en-US" dirty="0"/>
+              <a:t>@</a:t>
+            </a:r>
+            <a:r>
+              <a:rPr lang="en-US" dirty="0" err="1"/>
+              <a:t>jimmybogard</a:t>
+            </a:r>
+            <a:endParaRPr lang="en-US" dirty="0"/>
           </a:p>
         </p:txBody>
       </p:sp>
@@ -12637,7 +12839,7 @@
             </a:r>
             <a:r>
               <a:rPr lang="en-US" dirty="0" err="1"/>
-              <a:t>jbogard</a:t>
+              <a:t>jimmybogard</a:t>
             </a:r>
             <a:endParaRPr lang="en-US" dirty="0"/>
           </a:p>
@@ -12763,8 +12965,12 @@
           <a:lstStyle/>
           <a:p>
             <a:r>
-              <a:rPr lang="en-US"/>
-              <a:t>@jbogard</a:t>
+              <a:rPr lang="en-US" dirty="0"/>
+              <a:t>@</a:t>
+            </a:r>
+            <a:r>
+              <a:rPr lang="en-US" dirty="0" err="1"/>
+              <a:t>jimmybogard</a:t>
             </a:r>
             <a:endParaRPr lang="en-US" dirty="0"/>
           </a:p>
@@ -13170,8 +13376,12 @@
           <a:lstStyle/>
           <a:p>
             <a:r>
-              <a:rPr lang="en-US"/>
-              <a:t>@jbogard</a:t>
+              <a:rPr lang="en-US" dirty="0"/>
+              <a:t>@</a:t>
+            </a:r>
+            <a:r>
+              <a:rPr lang="en-US" dirty="0" err="1"/>
+              <a:t>jimmybogard</a:t>
             </a:r>
             <a:endParaRPr lang="en-US" dirty="0"/>
           </a:p>
@@ -13696,8 +13906,12 @@
           <a:lstStyle/>
           <a:p>
             <a:r>
-              <a:rPr lang="en-US"/>
-              <a:t>@jbogard</a:t>
+              <a:rPr lang="en-US" dirty="0"/>
+              <a:t>@</a:t>
+            </a:r>
+            <a:r>
+              <a:rPr lang="en-US" dirty="0" err="1"/>
+              <a:t>jimmybogard</a:t>
             </a:r>
             <a:endParaRPr lang="en-US" dirty="0"/>
           </a:p>
@@ -14283,8 +14497,12 @@
           <a:lstStyle/>
           <a:p>
             <a:r>
-              <a:rPr lang="en-US"/>
-              <a:t>@jbogard</a:t>
+              <a:rPr lang="en-US" dirty="0"/>
+              <a:t>@</a:t>
+            </a:r>
+            <a:r>
+              <a:rPr lang="en-US" dirty="0" err="1"/>
+              <a:t>jimmybogard</a:t>
             </a:r>
             <a:endParaRPr lang="en-US" dirty="0"/>
           </a:p>
@@ -14511,8 +14729,12 @@
           <a:lstStyle/>
           <a:p>
             <a:r>
-              <a:rPr lang="en-US"/>
-              <a:t>@jbogard</a:t>
+              <a:rPr lang="en-US" dirty="0"/>
+              <a:t>@</a:t>
+            </a:r>
+            <a:r>
+              <a:rPr lang="en-US" dirty="0" err="1"/>
+              <a:t>jimmybogard</a:t>
             </a:r>
             <a:endParaRPr lang="en-US" dirty="0"/>
           </a:p>
@@ -15779,8 +16001,12 @@
           <a:lstStyle/>
           <a:p>
             <a:r>
-              <a:rPr lang="en-US"/>
-              <a:t>@jbogard</a:t>
+              <a:rPr lang="en-US" dirty="0"/>
+              <a:t>@</a:t>
+            </a:r>
+            <a:r>
+              <a:rPr lang="en-US" dirty="0" err="1"/>
+              <a:t>jimmybogard</a:t>
             </a:r>
             <a:endParaRPr lang="en-US" dirty="0"/>
           </a:p>
@@ -16007,8 +16233,12 @@
           <a:lstStyle/>
           <a:p>
             <a:r>
-              <a:rPr lang="en-US"/>
-              <a:t>@jbogard</a:t>
+              <a:rPr lang="en-US" dirty="0"/>
+              <a:t>@</a:t>
+            </a:r>
+            <a:r>
+              <a:rPr lang="en-US" dirty="0" err="1"/>
+              <a:t>jimmybogard</a:t>
             </a:r>
             <a:endParaRPr lang="en-US" dirty="0"/>
           </a:p>
